--- a/ppt/PyQt01-Intro.pptx
+++ b/ppt/PyQt01-Intro.pptx
@@ -4478,8 +4478,8 @@
               <a:t>install</a:t>
             </a:r>
             <a:r>
-              <a:rPr lang="fr-FR"/>
-              <a:t> PyQt6-tools</a:t>
+              <a:rPr lang="fr-FR" dirty="0"/>
+              <a:t> PyQt6</a:t>
             </a:r>
           </a:p>
         </p:txBody>
